--- a/Unit decks/Unit 10 - ESRG Alignment.pptx
+++ b/Unit decks/Unit 10 - ESRG Alignment.pptx
@@ -1066,6 +1066,56 @@
             </a:r>
             <a:endParaRPr lang="en-US" dirty="0"/>
           </a:p>
+          <a:p/>
+          <a:p>
+            <a:r>
+              <a:t>Professional insights:</a:t>
+            </a:r>
+          </a:p>
+          <a:p/>
+          <a:p>
+            <a:r>
+              <a:t>S · Systems: Strategic drift sets in when platforms, policies, structures or projects become ends in themselves. Ask repeatedly whether institutional assets still produce the intended value.</a:t>
+            </a:r>
+          </a:p>
+          <a:p>
+            <a:r>
+              <a:t>Source: Journal, 15 July 2026 — Professional Insights: Strategy</a:t>
+            </a:r>
+          </a:p>
+          <a:p/>
+          <a:p>
+            <a:r>
+              <a:t>R · Unsustainable workloads: Organisations that give people no margin to renew and recover produce people who eventually cannot run at all. The rhythm of renewal is part of the design of sustainable excellence.</a:t>
+            </a:r>
+          </a:p>
+          <a:p>
+            <a:r>
+              <a:t>Source: Journal, 21 January 2026 — Professional Insights: Culture</a:t>
+            </a:r>
+          </a:p>
+          <a:p/>
+          <a:p>
+            <a:r>
+              <a:t>R · Capacity to deploy: Organisations underestimate available resource when they have not invested in the capacity to deploy it: the people, processes and structures that turn opportunity into output. Ask what the organisation is prepared to receive and deploy, alongside what it has.</a:t>
+            </a:r>
+          </a:p>
+          <a:p>
+            <a:r>
+              <a:t>Source: Journal, 20 June 2026 — Professional Insights: Strategy</a:t>
+            </a:r>
+          </a:p>
+          <a:p/>
+          <a:p>
+            <a:r>
+              <a:t>G · Selective accountability: Structures that let certain roles accumulate disproportionate influence without a reset mechanism eventually produce internal inequality. Review concentrations of resource, influence and opportunity periodically.</a:t>
+            </a:r>
+          </a:p>
+          <a:p>
+            <a:r>
+              <a:t>Source: Journal, 27 February 2026 — Professional Insights: Strategy</a:t>
+            </a:r>
+          </a:p>
         </p:txBody>
       </p:sp>
       <p:sp>
@@ -1161,6 +1211,45 @@
             </a:r>
             <a:endParaRPr lang="en-US" dirty="0"/>
           </a:p>
+          <a:p/>
+          <a:p>
+            <a:r>
+              <a:t>Professional insights:</a:t>
+            </a:r>
+          </a:p>
+          <a:p/>
+          <a:p>
+            <a:r>
+              <a:t>Naming unsustainable practice: A culture that cannot name its unsustainable practices before they produce a breakdown keeps managing consequences and leaves the causes untouched. Create room for an outside voice that can name what insiders are too close to see.</a:t>
+            </a:r>
+          </a:p>
+          <a:p>
+            <a:r>
+              <a:t>Source: Journal, 11 February 2026 — Professional Insights: Culture</a:t>
+            </a:r>
+          </a:p>
+          <a:p/>
+          <a:p>
+            <a:r>
+              <a:t>Honest signals: Organisations become more intelligent when difficult information is incorporated into decisions. Honest signals can improve direction. Use this with “Friction as organisational intelligence”.</a:t>
+            </a:r>
+          </a:p>
+          <a:p>
+            <a:r>
+              <a:t>Source: Journal, 5 September 2026 — Professional Insights: Strategy</a:t>
+            </a:r>
+          </a:p>
+          <a:p/>
+          <a:p>
+            <a:r>
+              <a:t>Values misalignment: When espoused values and rewarded behaviours diverge, people calibrate to the real signal and discount the stated one. The work is closing the distance between declaration and practice.</a:t>
+            </a:r>
+          </a:p>
+          <a:p>
+            <a:r>
+              <a:t>Source: Journal, 13 June 2026 — Professional Insights: Culture</a:t>
+            </a:r>
+          </a:p>
         </p:txBody>
       </p:sp>
       <p:sp>
@@ -1859,6 +1948,23 @@
             </a:r>
             <a:endParaRPr lang="en-US" dirty="0"/>
           </a:p>
+          <a:p/>
+          <a:p>
+            <a:r>
+              <a:t>Professional insights:</a:t>
+            </a:r>
+          </a:p>
+          <a:p/>
+          <a:p>
+            <a:r>
+              <a:t>Culture is formed deliberately: People cannot live by standards they have never understood. Repeated teaching creates a common language through which behaviour can be interpreted and corrected, and culture becomes credible when declared beliefs are visible in everyday behaviour.</a:t>
+            </a:r>
+          </a:p>
+          <a:p>
+            <a:r>
+              <a:t>Source: Journal, 19 July 2026 — Professional Insights: Culture</a:t>
+            </a:r>
+          </a:p>
         </p:txBody>
       </p:sp>
       <p:sp>
@@ -1973,6 +2079,23 @@
             </a:r>
             <a:endParaRPr lang="en-US" dirty="0"/>
           </a:p>
+          <a:p/>
+          <a:p>
+            <a:r>
+              <a:t>Professional insights:</a:t>
+            </a:r>
+          </a:p>
+          <a:p/>
+          <a:p>
+            <a:r>
+              <a:t>Values before commercial pressure: Organisations that make commercial success the primary culture signal produce cultures where ethical shortcuts become routine whenever they pay. Value clarity must come before commercial pressure.</a:t>
+            </a:r>
+          </a:p>
+          <a:p>
+            <a:r>
+              <a:t>Source: Journal, 16 January 2026 — Professional Insights: Culture</a:t>
+            </a:r>
+          </a:p>
         </p:txBody>
       </p:sp>
       <p:sp>
@@ -2082,6 +2205,34 @@
 One sentence explaining what the value means in daily practice — specific enough that a new employee reading it on Day 1 would know exactly what behaviour will be recognised and what will be corrected.</a:t>
             </a:r>
             <a:endParaRPr lang="en-US" dirty="0"/>
+          </a:p>
+          <a:p/>
+          <a:p>
+            <a:r>
+              <a:t>Professional insights:</a:t>
+            </a:r>
+          </a:p>
+          <a:p/>
+          <a:p>
+            <a:r>
+              <a:t>Step 1 · Define the behaviour: Many cultural change initiatives fail because they operate at the level of slogans and posters. Translate one value into a specific operational instruction: what the team does, in what circumstance, by default, when the leader is absent.</a:t>
+            </a:r>
+          </a:p>
+          <a:p>
+            <a:r>
+              <a:t>Source: Journal, 30 April 2026 — Professional Insights: Culture</a:t>
+            </a:r>
+          </a:p>
+          <a:p/>
+          <a:p>
+            <a:r>
+              <a:t>Step 3 · Write the norm statement: When new staff ask “what should I actually do here?”, a healthy culture gives concrete, immediate answers. Take one value, write down the single specific action that proves it, and say it out loud to the team.</a:t>
+            </a:r>
+          </a:p>
+          <a:p>
+            <a:r>
+              <a:t>Source: Journal, 5 June 2026 — Professional Insights: Culture</a:t>
+            </a:r>
           </a:p>
         </p:txBody>
       </p:sp>
@@ -2277,6 +2428,45 @@
             </a:r>
             <a:endParaRPr lang="en-US" dirty="0"/>
           </a:p>
+          <a:p/>
+          <a:p>
+            <a:r>
+              <a:t>Professional insights:</a:t>
+            </a:r>
+          </a:p>
+          <a:p/>
+          <a:p>
+            <a:r>
+              <a:t>Test 1 · The New Employee Test: Audit the culture by asking whether a stranger watching the team for a week could infer the stated values from what people actually do. Knowledge that changes no behaviour is decoration.</a:t>
+            </a:r>
+          </a:p>
+          <a:p>
+            <a:r>
+              <a:t>Source: Journal, 1 July 2026 — Professional Insights: Culture</a:t>
+            </a:r>
+          </a:p>
+          <a:p/>
+          <a:p>
+            <a:r>
+              <a:t>Test 2 · The Pressure Test: Culture becomes most visible when normal conditions disappear. A culture may claim empowerment until something goes wrong and every decision is pulled upward, or claim openness until someone challenges a senior leader.</a:t>
+            </a:r>
+          </a:p>
+          <a:p>
+            <a:r>
+              <a:t>Source: Journal, 29 September 2026 — Professional Insights: Culture</a:t>
+            </a:r>
+          </a:p>
+          <a:p/>
+          <a:p>
+            <a:r>
+              <a:t>Test 3 · The Mirror Test: Reforms announced for the rest of the organisation will not hold until the compromised practice inside the leader’s own team is dismantled. Identify one celebrated habit in your team that contradicts a value you espouse, and dismantle it before asking anyone else to change.</a:t>
+            </a:r>
+          </a:p>
+          <a:p>
+            <a:r>
+              <a:t>Source: Journal, 20 April 2026 — Professional Insights: Culture</a:t>
+            </a:r>
+          </a:p>
         </p:txBody>
       </p:sp>
       <p:sp>
@@ -2373,6 +2563,34 @@
             </a:r>
             <a:endParaRPr lang="en-US" dirty="0"/>
           </a:p>
+          <a:p/>
+          <a:p>
+            <a:r>
+              <a:t>Professional insights:</a:t>
+            </a:r>
+          </a:p>
+          <a:p/>
+          <a:p>
+            <a:r>
+              <a:t>Beyond the leader’s presence: Whatever the culture does because the leader is watching will stop when the leader is absent. Convert leader-dependent behaviours into structurally embedded ones through systems, rituals and named commitments.</a:t>
+            </a:r>
+          </a:p>
+          <a:p>
+            <a:r>
+              <a:t>Source: Journal, 21 April 2026 — Professional Insights: Culture</a:t>
+            </a:r>
+          </a:p>
+          <a:p/>
+          <a:p>
+            <a:r>
+              <a:t>Hosting the value: New cultural commitments are often launched with ceremony and then passed from team to team because no one does the work of hosting them. Name the function or team that will carry each norm.</a:t>
+            </a:r>
+          </a:p>
+          <a:p>
+            <a:r>
+              <a:t>Source: Journal, 6 May 2026 — Professional Insights: Culture</a:t>
+            </a:r>
+          </a:p>
         </p:txBody>
       </p:sp>
       <p:sp>
@@ -2475,6 +2693,23 @@
             </a:r>
             <a:endParaRPr lang="en-US" dirty="0"/>
           </a:p>
+          <a:p/>
+          <a:p>
+            <a:r>
+              <a:t>Professional insights:</a:t>
+            </a:r>
+          </a:p>
+          <a:p/>
+          <a:p>
+            <a:r>
+              <a:t>A complete response: Organisations that discover a fundamental misalignment between stated values and actual practice face a choice: respond completely, or address only what is comfortable. The part left untouched is the part that resurfaces.</a:t>
+            </a:r>
+          </a:p>
+          <a:p>
+            <a:r>
+              <a:t>Source: Journal, 29 June 2026 — Professional Insights: Strategy</a:t>
+            </a:r>
+          </a:p>
         </p:txBody>
       </p:sp>
       <p:sp>
@@ -2766,6 +3001,23 @@
 - ✎ Reflection — Most strategies that survive the first quarter fail by the third. What does that tell you about where execution actually breaks down in your organisation?</a:t>
             </a:r>
             <a:endParaRPr lang="en-US" dirty="0"/>
+          </a:p>
+          <a:p/>
+          <a:p>
+            <a:r>
+              <a:t>Professional insights:</a:t>
+            </a:r>
+          </a:p>
+          <a:p/>
+          <a:p>
+            <a:r>
+              <a:t>Foundations first: Organisations that keep pursuing growth without repairing their foundations eventually exhaust themselves. Sustainable strategy restores the core capabilities and values that support long-term performance.</a:t>
+            </a:r>
+          </a:p>
+          <a:p>
+            <a:r>
+              <a:t>Source: Journal, 24 July 2026 — Professional Insights: Strategy</a:t>
+            </a:r>
           </a:p>
         </p:txBody>
       </p:sp>
@@ -2947,6 +3199,34 @@
             </a:r>
             <a:endParaRPr lang="en-US" dirty="0"/>
           </a:p>
+          <a:p/>
+          <a:p>
+            <a:r>
+              <a:t>Professional insights:</a:t>
+            </a:r>
+          </a:p>
+          <a:p/>
+          <a:p>
+            <a:r>
+              <a:t>Strategy becomes structure: A vision remains fragile when responsibilities are unclear, resources are poorly managed and essential activities depend on a few individuals. Strong strategy asks what capabilities, roles, resources and operating rhythms will make the achievement possible. Many organisations fail because the supporting system was never designed.</a:t>
+            </a:r>
+          </a:p>
+          <a:p>
+            <a:r>
+              <a:t>Source: Journal, 10 July 2026 — Professional Insights: Strategy</a:t>
+            </a:r>
+          </a:p>
+          <a:p/>
+          <a:p>
+            <a:r>
+              <a:t>G · Governance: Build governance structures with the power to prevent decisions that will harm the organisation. A structure that can only register objections leaves the harm in place.</a:t>
+            </a:r>
+          </a:p>
+          <a:p>
+            <a:r>
+              <a:t>Source: Journal, 16 February 2026 — Professional Insights: Culture</a:t>
+            </a:r>
+          </a:p>
         </p:txBody>
       </p:sp>
       <p:sp>
@@ -3041,6 +3321,23 @@
             </a:r>
             <a:endParaRPr lang="en-US" dirty="0"/>
           </a:p>
+          <a:p/>
+          <a:p>
+            <a:r>
+              <a:t>Professional insights:</a:t>
+            </a:r>
+          </a:p>
+          <a:p/>
+          <a:p>
+            <a:r>
+              <a:t>Beyond extraordinary effort: An organisation cannot rely indefinitely on extraordinary effort. Sustainable results need structures that protect what has been achieved, with the right behaviours embedded in responsibilities and systems.</a:t>
+            </a:r>
+          </a:p>
+          <a:p>
+            <a:r>
+              <a:t>Source: Journal, 8 August 2026 — Professional Insights: Culture</a:t>
+            </a:r>
+          </a:p>
         </p:txBody>
       </p:sp>
       <p:sp>
@@ -3251,6 +3548,34 @@
 - ✎ Reflection — Which enabling condition is weakest in your organisation right now — and what is the execution cost?</a:t>
             </a:r>
             <a:endParaRPr lang="en-US" dirty="0"/>
+          </a:p>
+          <a:p/>
+          <a:p>
+            <a:r>
+              <a:t>Professional insights:</a:t>
+            </a:r>
+          </a:p>
+          <a:p/>
+          <a:p>
+            <a:r>
+              <a:t>R · Resource the people who carry it: Organisations that run their best people to exhaustion before the work is done lose their most valuable asset at the moment of greatest need. Build the conditions, rhythms and support that let people finish the work at full capacity.</a:t>
+            </a:r>
+          </a:p>
+          <a:p>
+            <a:r>
+              <a:t>Source: Journal, 1 April 2026 — Professional Insights: Strategy</a:t>
+            </a:r>
+          </a:p>
+          <a:p/>
+          <a:p>
+            <a:r>
+              <a:t>Communication and capability: Knowledge of standards does not guarantee behaviour. Implementation needs capability, reinforcement and environmental support alongside communication.</a:t>
+            </a:r>
+          </a:p>
+          <a:p>
+            <a:r>
+              <a:t>Source: Journal, 20 August 2026 — Professional Insights: Strategy</a:t>
+            </a:r>
           </a:p>
         </p:txBody>
       </p:sp>

--- a/Unit decks/Unit 10 - ESRG Alignment.pptx
+++ b/Unit decks/Unit 10 - ESRG Alignment.pptx
@@ -536,6 +536,69 @@
             </a:r>
             <a:endParaRPr lang="en-US" dirty="0"/>
           </a:p>
+          <a:p/>
+          <a:p>
+            <a:r>
+              <a:t>Source detail (S2R® manuscript):</a:t>
+            </a:r>
+          </a:p>
+          <a:p/>
+          <a:p>
+            <a:r>
+              <a:t>Grounding (Pillar 3 of DIG): Grounding is where strategy execution is sustained. It is the discipline that ensures what has been defined in Direction and driven through Influence is fully translated into consistent, lived organisational performance.</a:t>
+            </a:r>
+          </a:p>
+          <a:p>
+            <a:r>
+              <a:t>Grounding carries a singular responsibility: to close the gap between what is intended and what is actually consistently realised.</a:t>
+            </a:r>
+          </a:p>
+          <a:p>
+            <a:r>
+              <a:t>Grounding establishes a non-negotiable standard:</a:t>
+            </a:r>
+          </a:p>
+          <a:p>
+            <a:r>
+              <a:t>- What is assigned must be fully executed.</a:t>
+            </a:r>
+          </a:p>
+          <a:p>
+            <a:r>
+              <a:t>- What is executed must be sustained.</a:t>
+            </a:r>
+          </a:p>
+          <a:p>
+            <a:r>
+              <a:t>- What is sustained must be reinforced through systems, culture, and accountability.</a:t>
+            </a:r>
+          </a:p>
+          <a:p/>
+          <a:p>
+            <a:r>
+              <a:t>Within DIG:</a:t>
+            </a:r>
+          </a:p>
+          <a:p>
+            <a:r>
+              <a:t>- Direction defines the strategic position and intended outcomes.</a:t>
+            </a:r>
+          </a:p>
+          <a:p>
+            <a:r>
+              <a:t>- Influence mobilises leadership to drive execution.</a:t>
+            </a:r>
+          </a:p>
+          <a:p>
+            <a:r>
+              <a:t>- Grounding ensures those outcomes are consistently achieved, embedded, and maintained.</a:t>
+            </a:r>
+          </a:p>
+          <a:p>
+            <a:r>
+              <a:t>It is through Grounding that strategy moves from activity to performance, from progress to completion, and from isolated success to organisational discipline. Grounding is therefore the condition that stabilises execution into sustained results.</a:t>
+            </a:r>
+          </a:p>
         </p:txBody>
       </p:sp>
       <p:sp>
@@ -671,6 +734,23 @@
 AIM · SAY · ONE · OAR · SET · SEE</a:t>
             </a:r>
             <a:endParaRPr lang="en-US" dirty="0"/>
+          </a:p>
+          <a:p/>
+          <a:p>
+            <a:r>
+              <a:t>Source detail (S2R® manuscript):</a:t>
+            </a:r>
+          </a:p>
+          <a:p/>
+          <a:p>
+            <a:r>
+              <a:t>Collaboration (ONE), further detail: We bring different perspectives, resolve them with respect, and execute as one.</a:t>
+            </a:r>
+          </a:p>
+          <a:p>
+            <a:r>
+              <a:t>Human-Centricity (SEE), further detail: The awareness of the person on the other side applies to every interaction, every decision, and every performance conversation.</a:t>
+            </a:r>
           </a:p>
         </p:txBody>
       </p:sp>
@@ -843,6 +923,97 @@
             </a:r>
             <a:endParaRPr lang="en-US" dirty="0"/>
           </a:p>
+          <a:p/>
+          <a:p>
+            <a:r>
+              <a:t>Source detail (S2R® manuscript):</a:t>
+            </a:r>
+          </a:p>
+          <a:p/>
+          <a:p>
+            <a:r>
+              <a:t>Setting: Q1 2026 Execution Muscle Scan, run post-performance review.</a:t>
+            </a:r>
+          </a:p>
+          <a:p>
+            <a:r>
+              <a:t>Scanner brief: Each executive records the single most significant issue observed during the quarter. Issues can sit in any ESRG element.</a:t>
+            </a:r>
+          </a:p>
+          <a:p/>
+          <a:p>
+            <a:r>
+              <a:t>Step 1, detail the table above shortens:</a:t>
+            </a:r>
+          </a:p>
+          <a:p>
+            <a:r>
+              <a:t>- Sarah Mokoena (COO): No one with decision authority is in the room.</a:t>
+            </a:r>
+          </a:p>
+          <a:p>
+            <a:r>
+              <a:t>- Priya Naidoo (CFO): The two strategic initiatives are underfunded by approximately 40% against their approved plans.</a:t>
+            </a:r>
+          </a:p>
+          <a:p>
+            <a:r>
+              <a:t>- Amara Diallo (CSO): The contradictory instructions to the vendor came from two approving leaders.</a:t>
+            </a:r>
+          </a:p>
+          <a:p/>
+          <a:p>
+            <a:r>
+              <a:t>Step 4, fuller wording of the overlaps (what the collective pattern reveals that no individual scanner could show alone):</a:t>
+            </a:r>
+          </a:p>
+          <a:p>
+            <a:r>
+              <a:t>Overlap 1 (O · Organisational Alignment): The four leaders flag it from completely different angles, across both Governance and Environment.</a:t>
+            </a:r>
+          </a:p>
+          <a:p>
+            <a:r>
+              <a:t>Overlap 2 (M · Management Discipline): David (CTO): even when decisions are made, they are based on last week’s reality. Amara (CSO): accountability cannot be cleanly assigned when commitments are missed. Collective signal: leaders’ commitment is intact and the weakness is structural. Asking leaders to be more disciplined without fixing the structure is pressure without leverage.</a:t>
+            </a:r>
+          </a:p>
+          <a:p>
+            <a:r>
+              <a:t>Overlap 3 (P · People &amp; Capability): James (CPO): capability development has no real consequence or investment behind it. Priya (CFO): the capability required to deliver the underfunded initiatives cannot be deployed even where it exists. Lebo (CMO): capable people in the Cape Town hub are not contributing at the level they could, because of structural inaccessibility. Collective signal: People &amp; Capability is a systemic condition. Capability exists and is being constrained by underfunding, structural exclusion, and a cultural environment that does not reinforce development.</a:t>
+            </a:r>
+          </a:p>
+          <a:p/>
+          <a:p>
+            <a:r>
+              <a:t>Why RED, further detail: Multiple ESRG elements are flagged HIGH across the team even where individual elements show WATCH.</a:t>
+            </a:r>
+          </a:p>
+          <a:p>
+            <a:r>
+              <a:t>Q4, context: Priya’s Resources issue is the only purely financial flag.</a:t>
+            </a:r>
+          </a:p>
+          <a:p/>
+          <a:p>
+            <a:r>
+              <a:t>The consolidated insight (what this team now knows that they did not know before the scan). The scan revealed three things the individual scanners could not:</a:t>
+            </a:r>
+          </a:p>
+          <a:p>
+            <a:r>
+              <a:t>First: Organisational Alignment is the most stressed COMPASS zone in the organisation right now. It is being attacked from four directions simultaneously. It will not self-correct.</a:t>
+            </a:r>
+          </a:p>
+          <a:p>
+            <a:r>
+              <a:t>Second: Management Discipline looks like a leadership behaviour problem from inside each function. From the consolidated view it is a structural problem: broken forums, stale data, and ambiguous authority. The intervention is architectural.</a:t>
+            </a:r>
+          </a:p>
+          <a:p>
+            <a:r>
+              <a:t>Third: People &amp; Capability is constrained at three different points in the system. No single intervention will release it.</a:t>
+            </a:r>
+          </a:p>
         </p:txBody>
       </p:sp>
       <p:sp>
@@ -940,6 +1111,38 @@
 Time: the facilitator file gives no minute timing for this section (see the Timing watch point in the Session Overview).</a:t>
             </a:r>
             <a:endParaRPr lang="en-US" dirty="0"/>
+          </a:p>
+          <a:p/>
+          <a:p>
+            <a:r>
+              <a:t>Source detail (S2R® manuscript):</a:t>
+            </a:r>
+          </a:p>
+          <a:p/>
+          <a:p>
+            <a:r>
+              <a:t>The section question in full: Where are the ESRG friction zones across OKR delivery?</a:t>
+            </a:r>
+          </a:p>
+          <a:p>
+            <a:r>
+              <a:t>Section opening: Each ESRG domain carries its own set of predictable friction patterns. These patterns do not appear randomly. They arise when the organisational conditions supporting execution lag behind the strategic ambition the leadership team has set.</a:t>
+            </a:r>
+          </a:p>
+          <a:p>
+            <a:r>
+              <a:t>Understanding these friction patterns allows leaders to recognise early signals of execution strain before performance outcomes begin to deteriorate. When leaders know what to look for, they can intervene earlier, strengthening the enabling conditions that allow the strategy to move forward with stability.</a:t>
+            </a:r>
+          </a:p>
+          <a:p>
+            <a:r>
+              <a:t>Friction rarely begins as a crisis. A delayed decision here. A confusing data report there. A team stretched slightly beyond its capacity. Over time these small frictions compound, eventually slowing the entire execution system.</a:t>
+            </a:r>
+          </a:p>
+          <a:p>
+            <a:r>
+              <a:t>This unit therefore trains leaders to observe where friction is emerging across the four ESRG domains, and to understand what type of organisational intervention is required to restore alignment.</a:t>
+            </a:r>
           </a:p>
         </p:txBody>
       </p:sp>
@@ -1069,6 +1272,161 @@
           <a:p/>
           <a:p>
             <a:r>
+              <a:t>Source detail (S2R® manuscript):</a:t>
+            </a:r>
+          </a:p>
+          <a:p/>
+          <a:p>
+            <a:r>
+              <a:t>E · Environment friction, further detail</a:t>
+            </a:r>
+          </a:p>
+          <a:p>
+            <a:r>
+              <a:t>Definition: when the physical and behavioural conditions of work do not support the collaboration, focus, and performance required by the strategy. Physical friction and behavioural friction often compound each other.</a:t>
+            </a:r>
+          </a:p>
+          <a:p>
+            <a:r>
+              <a:t>Physical: In many organisations, the physical environment evolves slowly while strategy evolves rapidly. The new ways of working include hybrid engagement with customers or partners. Teams that depend on each other for daily interaction are located far apart.</a:t>
+            </a:r>
+          </a:p>
+          <a:p>
+            <a:r>
+              <a:t>Behavioural: Behavioural friction is subtler and more consequential. It occurs when the values, cultural norms, and psychological conditions of the workplace are misaligned with the strategic direction.</a:t>
+            </a:r>
+          </a:p>
+          <a:p>
+            <a:r>
+              <a:t>Leaders who are assessed only on results, and never on conduct, signal to the organisation that values are optional when performance is strong. That signal travels fast and compounds silently. The gap between espoused values and enacted values is a strategic liability.</a:t>
+            </a:r>
+          </a:p>
+          <a:p>
+            <a:r>
+              <a:t>Without a Cultural Operating Code, implicit expectations are interpreted differently in different functions as well as at different seniority levels. The inconsistency creates a fragmented behavioural environment where the organisation’s stated culture and its lived culture are experienced as two different organisations.</a:t>
+            </a:r>
+          </a:p>
+          <a:p>
+            <a:r>
+              <a:t>When team members avoid difficult performance conversations, small problems compound into larger operational breakdowns. The cultural environment may tolerate the silencing of dissent by intent or by neglect.</a:t>
+            </a:r>
+          </a:p>
+          <a:p>
+            <a:r>
+              <a:t>Cultural signals embedded in daily rituals also matter. The way leaders run meetings, how progress is discussed, what behaviour is visibly recognised and what is quietly tolerated: all of these communicate what the organisation truly values. If those signals contradict the strategic priorities, they quietly erode the alignment between the organisation’s stated direction and its daily behaviour.</a:t>
+            </a:r>
+          </a:p>
+          <a:p>
+            <a:r>
+              <a:t>When behavioural environment friction is present, execution becomes harder than it needs to be, because the human system carrying the strategy is not fully configured to support it.</a:t>
+            </a:r>
+          </a:p>
+          <a:p/>
+          <a:p>
+            <a:r>
+              <a:t>S · Systems friction, further detail</a:t>
+            </a:r>
+          </a:p>
+          <a:p>
+            <a:r>
+              <a:t>Definition: when the organisation’s operational processes and digital infrastructure are not aligned with the execution requirements of the strategy.</a:t>
+            </a:r>
+          </a:p>
+          <a:p>
+            <a:r>
+              <a:t>Platform integration: Another common friction point arises when technology platforms fail to integrate with one another. Teams re-enter the same information across multiple systems, manually reconcile inconsistent data, or rely on spreadsheets outside the official system of record. These shadow processes create hidden risk, reduce execution visibility, and consume capacity that should be directed at strategic work.</a:t>
+            </a:r>
+          </a:p>
+          <a:p>
+            <a:r>
+              <a:t>Governance integration: Embedding governance within the system removes the latency and makes accountability a function of the workflow, independent of individual discipline.</a:t>
+            </a:r>
+          </a:p>
+          <a:p>
+            <a:r>
+              <a:t>Process documentation: When operational processes exist only in the experience of individuals, with no documented, accessible workflows, execution becomes inconsistent. Teams interpret procedures differently, handovers between functions become ambiguous, and knowledge is lost when experienced staff rotate or leave.</a:t>
+            </a:r>
+          </a:p>
+          <a:p/>
+          <a:p>
+            <a:r>
+              <a:t>R · Resources friction, further detail</a:t>
+            </a:r>
+          </a:p>
+          <a:p>
+            <a:r>
+              <a:t>Definition: when the organisation’s capabilities, capacity, and investments are not aligned with the demands created by the strategy.</a:t>
+            </a:r>
+          </a:p>
+          <a:p>
+            <a:r>
+              <a:t>Capability gaps are a common and predictable friction source. Teams may be asked to execute initiatives requiring advanced data analysis, digital systems integration, regulatory expertise, or specialised operational knowledge that is not yet present at sufficient scale. Without deliberate capability development, the organisation becomes dependent on a small number of individuals, creating bottlenecks that slow progress and single points of failure that create execution risk.</a:t>
+            </a:r>
+          </a:p>
+          <a:p>
+            <a:r>
+              <a:t>Capacity: When the organisation attempts to close the gap between strategic ambition and execution capacity through individual effort, without structural resourcing, it borrows against its own sustainability. Teams must be able to signal unsustainable workloads early, before performance degrades.</a:t>
+            </a:r>
+          </a:p>
+          <a:p>
+            <a:r>
+              <a:t>Financial misalignment: Budget allocations frequently reflect historical priorities and lag the current strategic direction. When critical initiatives lack funding while legacy activities continue to receive investment, the organisation operates in a state of resource friction regardless of how clearly the strategy is communicated.</a:t>
+            </a:r>
+          </a:p>
+          <a:p>
+            <a:r>
+              <a:t>Tools and specialist support: Resource friction may also arise from the absence of working tools, reliable technology, or accessible specialist support. When teams cannot reach the expertise they need (legal guidance, data analysis, technical support), decision-making slows and execution stalls. In these situations motivation and commitment are intact. The organisation is attempting to deliver outcomes without the capacity required to achieve them.</a:t>
+            </a:r>
+          </a:p>
+          <a:p/>
+          <a:p>
+            <a:r>
+              <a:t>G · Governance friction, further detail</a:t>
+            </a:r>
+          </a:p>
+          <a:p>
+            <a:r>
+              <a:t>Definition: when decision rights, accountability structures, and leadership oversight do not support the pace and discipline required for execution.</a:t>
+            </a:r>
+          </a:p>
+          <a:p>
+            <a:r>
+              <a:t>As strategic priorities evolve, structures designed to control risk may begin to slow the organisation’s ability to respond to emerging opportunities or operational challenges.</a:t>
+            </a:r>
+          </a:p>
+          <a:p>
+            <a:r>
+              <a:t>Decision rights: Unclear decision rights create the decision bottlenecks identified earlier in the programme, a pattern where progress waits for approval when empowered ownership should be advancing it.</a:t>
+            </a:r>
+          </a:p>
+          <a:p>
+            <a:r>
+              <a:t>Policy constraints can introduce friction when procedures designed for regulatory compliance or operational control are applied rigidly without considering the strategic context. When policy interpretation becomes a substitute for judgement, leaders avoid decisions altogether, allowing issues to remain unresolved while the organisation waits for certainty that rarely arrives.</a:t>
+            </a:r>
+          </a:p>
+          <a:p>
+            <a:r>
+              <a:t>Ethical integrity: Selective standards also show when conflicts of interest are tolerated and left unmanaged. Teams observe the inconsistency and gradually disengage from the formal processes designed to guide execution.</a:t>
+            </a:r>
+          </a:p>
+          <a:p>
+            <a:r>
+              <a:t>Leadership absence: Leaders who delegate governance entirely signal by their behaviour that governance belongs to a governance team and sits outside leadership responsibility. Governance credibility is built through visible leadership engagement. Policy documents alone do not build it.</a:t>
+            </a:r>
+          </a:p>
+          <a:p>
+            <a:r>
+              <a:t>Performance architecture: Governance misalignment with the performance architecture is a systemic friction source. The OKR and KPI systems established earlier in the DIG framework depend on clear accountability, transparent reporting, and regular review rhythms. If governance structures fail to sustain these practices (review forums become status updates, risk discussions are separated from performance discussions, accountability conversations are deferred), performance measurement becomes ceremonial and stops being operational.</a:t>
+            </a:r>
+          </a:p>
+          <a:p>
+            <a:r>
+              <a:t>When governance alignment is strong, decision-making becomes predictable and accountable. When it is weak, execution slows as teams navigate ambiguity, selective enforcement, and governance structures that were never updated to carry the weight of the current strategy.</a:t>
+            </a:r>
+          </a:p>
+          <a:p/>
+          <a:p>
+            <a:r>
               <a:t>Professional insights:</a:t>
             </a:r>
           </a:p>
@@ -1214,6 +1572,28 @@
           <a:p/>
           <a:p>
             <a:r>
+              <a:t>Source detail (S2R® manuscript):</a:t>
+            </a:r>
+          </a:p>
+          <a:p/>
+          <a:p>
+            <a:r>
+              <a:t>The reframe in full: Every instance of friction reveals something precise about the organisation’s readiness to sustain execution.</a:t>
+            </a:r>
+          </a:p>
+          <a:p>
+            <a:r>
+              <a:t>By examining where friction appears (in the physical or behavioural conditions of the environment, in the systems, in the resources, or in the governance structures), leaders gain the insight required to strengthen the enterprise, going beyond the management of its symptoms.</a:t>
+            </a:r>
+          </a:p>
+          <a:p>
+            <a:r>
+              <a:t>The executive team’s role at this stage goes beyond diagnosing friction. With targeted alignment actions in place, execution stops depending on individual heroism.</a:t>
+            </a:r>
+          </a:p>
+          <a:p/>
+          <a:p>
+            <a:r>
               <a:t>Professional insights:</a:t>
             </a:r>
           </a:p>
@@ -1348,6 +1728,18 @@
             </a:r>
             <a:endParaRPr lang="en-US" dirty="0"/>
           </a:p>
+          <a:p/>
+          <a:p>
+            <a:r>
+              <a:t>Source detail (S2R® manuscript):</a:t>
+            </a:r>
+          </a:p>
+          <a:p/>
+          <a:p>
+            <a:r>
+              <a:t>Section opening: This section establishes cross-functional ownership of the four ESRG domains. Each domain intersects multiple executive functions, and friction in one domain rarely stays contained within a single function. Sustained ESRG alignment therefore requires coordinated collective commitment across functions.</a:t>
+            </a:r>
+          </a:p>
         </p:txBody>
       </p:sp>
       <p:sp>
@@ -1441,6 +1833,28 @@
             </a:r>
             <a:endParaRPr lang="en-US" dirty="0"/>
           </a:p>
+          <a:p/>
+          <a:p>
+            <a:r>
+              <a:t>Source detail (S2R® manuscript):</a:t>
+            </a:r>
+          </a:p>
+          <a:p/>
+          <a:p>
+            <a:r>
+              <a:t>Why a scan is needed alongside the results review: The expedition check leaves the destination unquestioned. Strategy execution requires the same discipline.</a:t>
+            </a:r>
+          </a:p>
+          <a:p>
+            <a:r>
+              <a:t>Quarterly progress reviews typically focus on results: what has been delivered, where performance is ahead or behind target, and what adjustments must be made to the plan. While this review is essential, it does not examine whether the organisation itself remains aligned with the demands of the journey.</a:t>
+            </a:r>
+          </a:p>
+          <a:p>
+            <a:r>
+              <a:t>Results tell you where the expedition has arrived. The Execution Muscle Scan tells you whether the expedition is still strong enough to keep climbing.</a:t>
+            </a:r>
+          </a:p>
         </p:txBody>
       </p:sp>
       <p:sp>
@@ -1554,6 +1968,62 @@
             </a:r>
             <a:endParaRPr lang="en-US" dirty="0"/>
           </a:p>
+          <a:p/>
+          <a:p>
+            <a:r>
+              <a:t>Source detail (S2R® manuscript):</a:t>
+            </a:r>
+          </a:p>
+          <a:p/>
+          <a:p>
+            <a:r>
+              <a:t>How the four reflections work: Each reflection examines a different dimension of the organisation’s execution conditions. Together they produce a complete picture of ESRG alignment at the point of review.</a:t>
+            </a:r>
+          </a:p>
+          <a:p/>
+          <a:p>
+            <a:r>
+              <a:t>E · Environment: The leadership team first considers whether the working environment continues to support the physical and behavioural conditions required for execution. The behavioural check also covers how performance conversations are held, what behaviour is visibly recognised, and what is quietly tolerated.</a:t>
+            </a:r>
+          </a:p>
+          <a:p>
+            <a:r>
+              <a:t>Action: When environmental friction is identified, in either dimension, leaders identify the specific adjustments required to restore the conditions for productive, values-aligned execution before the next cycle begins.</a:t>
+            </a:r>
+          </a:p>
+          <a:p/>
+          <a:p>
+            <a:r>
+              <a:t>S · Systems: The second reflection examines the systems through which work moves across the organisation. Workflow visibility is sufficient when teams can see where work sits and what action is required.</a:t>
+            </a:r>
+          </a:p>
+          <a:p>
+            <a:r>
+              <a:t>Action: Where systems friction is identified, leadership actions focus on simplifying processes, improving integration, strengthening workflow visibility, or rationalising the shadow systems that have grown up around the official infrastructure.</a:t>
+            </a:r>
+          </a:p>
+          <a:p/>
+          <a:p>
+            <a:r>
+              <a:t>R · Resources: The third reflection focuses on capability, capacity, and sustainability. The skills in question are those the current phase of execution demands, which may differ from the skills teams had at the start of the strategy. The team also assesses whether specialist expertise is accessible when required. Critically, this reflection must also examine employee sustainability.</a:t>
+            </a:r>
+          </a:p>
+          <a:p>
+            <a:r>
+              <a:t>Action: Where resource strain appears, leaders identify the investments, reallocation decisions, or sustainability adjustments required to restore delivery capacity before the next execution cycle.</a:t>
+            </a:r>
+          </a:p>
+          <a:p/>
+          <a:p>
+            <a:r>
+              <a:t>G · Governance: The final reflection examines the organisation’s decision and accountability structures. Review forums function as decision forums when issues are resolved and accountability is reinforced. This reflection also examines governance integrity.</a:t>
+            </a:r>
+          </a:p>
+          <a:p>
+            <a:r>
+              <a:t>Action: Where governance friction appears, the leadership team strengthens decision clarity, review rhythms, accountability structures, and, where necessary, addresses the integrity gaps that are quietly eroding governance credibility.</a:t>
+            </a:r>
+          </a:p>
         </p:txBody>
       </p:sp>
       <p:sp>
@@ -1653,6 +2123,33 @@
             </a:r>
             <a:endParaRPr lang="en-US" dirty="0"/>
           </a:p>
+          <a:p/>
+          <a:p>
+            <a:r>
+              <a:t>Source detail (S2R® manuscript):</a:t>
+            </a:r>
+          </a:p>
+          <a:p/>
+          <a:p>
+            <a:r>
+              <a:t>Where the scan sits: The Execution Muscle Scan operates within the diagnostic architecture established earlier in the programme.</a:t>
+            </a:r>
+          </a:p>
+          <a:p>
+            <a:r>
+              <a:t>COMPASS identified the seven zones where execution friction accumulates: Clarity of Direction, Organisational Alignment, Management Discipline, People &amp; Capability, Allocation of Resources, Systems &amp; Execution, Sensing &amp; Adaptation. ESRG provides the diagnostic view that explains why friction is accumulating in each zone.</a:t>
+            </a:r>
+          </a:p>
+          <a:p>
+            <a:r>
+              <a:t>Allocation of Resources, friction source in full: the budget follows history when it should follow strategy.</a:t>
+            </a:r>
+          </a:p>
+          <a:p>
+            <a:r>
+              <a:t>This pairing gives the leadership team two complementary instruments. The ESRG Scanner is the diagnostic tool that operationalises the Execution Muscle Scan into a structured, collective leadership instrument.</a:t>
+            </a:r>
+          </a:p>
         </p:txBody>
       </p:sp>
       <p:sp>
@@ -1755,6 +2252,49 @@
             </a:r>
             <a:endParaRPr lang="en-US" dirty="0"/>
           </a:p>
+          <a:p/>
+          <a:p>
+            <a:r>
+              <a:t>Source detail (S2R® manuscript):</a:t>
+            </a:r>
+          </a:p>
+          <a:p/>
+          <a:p>
+            <a:r>
+              <a:t>Collective signal intelligence, further detail: Each leader observes different signals from within their function. This is the discipline that separates organisations that react to performance decline from organisations that anticipate it.</a:t>
+            </a:r>
+          </a:p>
+          <a:p/>
+          <a:p>
+            <a:r>
+              <a:t>The outcome of the Execution Muscle Scan: The scan ensures that execution discipline extends beyond performance measurement, into the organisational conditions that make performance possible. The executive team proactively reinforces the conditions required for sustained delivery, ahead of any decline in results.</a:t>
+            </a:r>
+          </a:p>
+          <a:p>
+            <a:r>
+              <a:t>- Environment enables productive behaviour, in both the physical conditions of work and the behavioural standards that define how work is done.</a:t>
+            </a:r>
+          </a:p>
+          <a:p>
+            <a:r>
+              <a:t>- Systems streamline the flow of work, data, and decisions.</a:t>
+            </a:r>
+          </a:p>
+          <a:p>
+            <a:r>
+              <a:t>- Resources provide the capability, capacity, and sustainability to deliver over time.</a:t>
+            </a:r>
+          </a:p>
+          <a:p>
+            <a:r>
+              <a:t>- Governance maintains the rhythm of accountability, decision discipline, and ethical integrity.</a:t>
+            </a:r>
+          </a:p>
+          <a:p>
+            <a:r>
+              <a:t>These conditions must remain aligned across the COMPASS zones where execution is most under pressure.</a:t>
+            </a:r>
+          </a:p>
         </p:txBody>
       </p:sp>
       <p:sp>
@@ -1951,6 +2491,38 @@
           <a:p/>
           <a:p>
             <a:r>
+              <a:t>Source detail (S2R® manuscript):</a:t>
+            </a:r>
+          </a:p>
+          <a:p/>
+          <a:p>
+            <a:r>
+              <a:t>Purpose of the exercise: To apply the Values-to-Norms translation discipline to a real value set, producing COC norms that are observable, teachable, and measurable. Each team works through one value set of their choosing and presents their strongest norm to the full group.</a:t>
+            </a:r>
+          </a:p>
+          <a:p>
+            <a:r>
+              <a:t>Watch points, further detail:</a:t>
+            </a:r>
+          </a:p>
+          <a:p>
+            <a:r>
+              <a:t>- Acronyms: redirect if the team spends more time perfecting the acronym than defining the behaviour.</a:t>
+            </a:r>
+          </a:p>
+          <a:p>
+            <a:r>
+              <a:t>- Comfortable situations: the test of a COC norm is whether it holds under pressure. Further pressure situations to put to the team: a difficult client demands an exception; the honest report reflects badly on the reporter.</a:t>
+            </a:r>
+          </a:p>
+          <a:p>
+            <a:r>
+              <a:t>- Generic norms: watch for values that produce identical norms across different value sets. A norm that reads as a generic statement about doing the right thing needs more translation work.</a:t>
+            </a:r>
+          </a:p>
+          <a:p/>
+          <a:p>
+            <a:r>
               <a:t>Professional insights:</a:t>
             </a:r>
           </a:p>
@@ -2082,6 +2654,33 @@
           <a:p/>
           <a:p>
             <a:r>
+              <a:t>Source detail (S2R® manuscript):</a:t>
+            </a:r>
+          </a:p>
+          <a:p/>
+          <a:p>
+            <a:r>
+              <a:t>How to choose: Each set represents a distinct organisational character. Choose the one that most closely reflects your organisation’s current strategic context.</a:t>
+            </a:r>
+          </a:p>
+          <a:p>
+            <a:r>
+              <a:t>Value Set A (Governance-Led): built for organisations where accountability, stewardship, and institutional trust are the primary execution drivers.</a:t>
+            </a:r>
+          </a:p>
+          <a:p>
+            <a:r>
+              <a:t>Value Set B (Performance-Led): built for organisations where delivery pace, customer outcomes, and execution discipline are the primary drivers.</a:t>
+            </a:r>
+          </a:p>
+          <a:p>
+            <a:r>
+              <a:t>Value Set C (Purpose-Led): built for organisations where mission, human dignity, and long-term impact are the primary drivers.</a:t>
+            </a:r>
+          </a:p>
+          <a:p/>
+          <a:p>
+            <a:r>
               <a:t>Professional insights:</a:t>
             </a:r>
           </a:p>
@@ -2205,6 +2804,28 @@
 One sentence explaining what the value means in daily practice — specific enough that a new employee reading it on Day 1 would know exactly what behaviour will be recognised and what will be corrected.</a:t>
             </a:r>
             <a:endParaRPr lang="en-US" dirty="0"/>
+          </a:p>
+          <a:p/>
+          <a:p>
+            <a:r>
+              <a:t>Source detail (S2R® manuscript):</a:t>
+            </a:r>
+          </a:p>
+          <a:p/>
+          <a:p>
+            <a:r>
+              <a:t>Format: Part 2 is worked in triads.</a:t>
+            </a:r>
+          </a:p>
+          <a:p>
+            <a:r>
+              <a:t>Step 1, standard for the answer: a specific, observable behaviour. A principle or an aspiration does not qualify.</a:t>
+            </a:r>
+          </a:p>
+          <a:p>
+            <a:r>
+              <a:t>Step 2, standard for each word: a verb the leader performs. A quality the leader possesses does not qualify.</a:t>
+            </a:r>
           </a:p>
           <a:p/>
           <a:p>
@@ -2431,6 +3052,126 @@
           <a:p/>
           <a:p>
             <a:r>
+              <a:t>Source detail (S2R® manuscript):</a:t>
+            </a:r>
+          </a:p>
+          <a:p/>
+          <a:p>
+            <a:r>
+              <a:t>Facilitator only: further detail for the complete worked COC above. Do not distribute to participants before the exercise; it stays with the facilitator until teams have finished their own translation work.</a:t>
+            </a:r>
+          </a:p>
+          <a:p/>
+          <a:p>
+            <a:r>
+              <a:t>Facilitator only · Value Set A (Governance-Led):</a:t>
+            </a:r>
+          </a:p>
+          <a:p>
+            <a:r>
+              <a:t>Transparency (OPEN): A leader operating under OPEN does not withhold context to retain influence.</a:t>
+            </a:r>
+          </a:p>
+          <a:p>
+            <a:r>
+              <a:t>Courage (ACT): Courage is the decision to act despite discomfort. A leader operating under ACT does not leave the difficult thing unsaid because the room is not ready to hear it.</a:t>
+            </a:r>
+          </a:p>
+          <a:p>
+            <a:r>
+              <a:t>Service (FIRST): A leader operating under FIRST anticipates, invests, and stays, without waiting to be asked.</a:t>
+            </a:r>
+          </a:p>
+          <a:p>
+            <a:r>
+              <a:t>Resilience (HOLD): The gap is observed honestly. A leader operating under HOLD keeps the bar in place when execution is hard and raises support while keeping the standard.</a:t>
+            </a:r>
+          </a:p>
+          <a:p>
+            <a:r>
+              <a:t>Innovation (TEST): A leader operating under TEST tests their own idea and follows the data.</a:t>
+            </a:r>
+          </a:p>
+          <a:p>
+            <a:r>
+              <a:t>Stewardship (GUARD): We govern these for those who come after us. A leader operating under GUARD does not treat organisational resources as personal discretion.</a:t>
+            </a:r>
+          </a:p>
+          <a:p/>
+          <a:p>
+            <a:r>
+              <a:t>Facilitator only · Value Set B (Performance-Led):</a:t>
+            </a:r>
+          </a:p>
+          <a:p>
+            <a:r>
+              <a:t>Trust (EARN): A leader operating under EARN builds the reality of reliability: doing what they say, acknowledging when they have not, and showing up consistently even when it is inconvenient.</a:t>
+            </a:r>
+          </a:p>
+          <a:p>
+            <a:r>
+              <a:t>Agility (MOVE): A leader operating under MOVE adjusts with discipline when the evidence has shifted, and validates the change. The 360 indicator ends: “… to avoid the discomfort of admitting a change is needed?”</a:t>
+            </a:r>
+          </a:p>
+          <a:p>
+            <a:r>
+              <a:t>Quality (RIGHT): A leader operating under RIGHT checks before sending, reviews before submitting, and holds their team to this standard with the same consistency they hold themselves. “Good enough” is never the goal. The 360 indicator names pressure as well as workload.</a:t>
+            </a:r>
+          </a:p>
+          <a:p>
+            <a:r>
+              <a:t>Ownership (MINE): A leader operating under MINE acts on what they can address, and owns the consequence of that action, whether the outcome is success or a learning.</a:t>
+            </a:r>
+          </a:p>
+          <a:p>
+            <a:r>
+              <a:t>Growth (REACH): Growth includes tolerating the discomfort of learning something new. A leader operating under REACH invests in their team’s development as rigorously as they invest in delivery.</a:t>
+            </a:r>
+          </a:p>
+          <a:p>
+            <a:r>
+              <a:t>Inclusion (HEAR): Assumptions are examined before they are confirmed. A leader operating under HEAR seeks the challenge before anyone raises it. The 360 indicator names the differences: background, function, or perspective.</a:t>
+            </a:r>
+          </a:p>
+          <a:p/>
+          <a:p>
+            <a:r>
+              <a:t>Facilitator only · Value Set C (Purpose-Led):</a:t>
+            </a:r>
+          </a:p>
+          <a:p>
+            <a:r>
+              <a:t>Purpose (WHY): A leader operating under WHY can articulate exactly how every significant decision they make serves the mission, ahead of the metric, the convenience, and their personal preference.</a:t>
+            </a:r>
+          </a:p>
+          <a:p>
+            <a:r>
+              <a:t>Integrity (WHOLE): Integrity includes owning consequences without deflection, and holding ourselves to a standard that elevates. A leader operating under WHOLE holds one version of their standards, in public and in private.</a:t>
+            </a:r>
+          </a:p>
+          <a:p>
+            <a:r>
+              <a:t>Ubuntu (WE): Our success is bound up with the success of those around us. The 360 indicator adds a second question: “Does everyone at the table feel they belong there?”</a:t>
+            </a:r>
+          </a:p>
+          <a:p>
+            <a:r>
+              <a:t>Excellence (RAISE): A leader operating under RAISE celebrates evidence of improvement, and invests in producing more of it. The 360 indicator ends: “… given current constraints?”</a:t>
+            </a:r>
+          </a:p>
+          <a:p>
+            <a:r>
+              <a:t>Boldness (DARE): A leader operating under DARE names what the mission actually demands, advances when the path is unclear, and recalibrates honestly when the evidence tells them to, without treating recalibration as failure. The 360 indicator ends: “… and therefore safe to be accountable for?”</a:t>
+            </a:r>
+          </a:p>
+          <a:p>
+            <a:r>
+              <a:t>Care (TEND): A leader operating under TEND does not celebrate a result that was achieved at the cost of the people who delivered it. The 360 indicator ends: “… that is invisible in the performance report?”</a:t>
+            </a:r>
+          </a:p>
+          <a:p/>
+          <a:p>
+            <a:r>
               <a:t>Professional insights:</a:t>
             </a:r>
           </a:p>
@@ -2696,6 +3437,82 @@
           <a:p/>
           <a:p>
             <a:r>
+              <a:t>Source detail (S2R® manuscript):</a:t>
+            </a:r>
+          </a:p>
+          <a:p/>
+          <a:p>
+            <a:r>
+              <a:t>Further detail for each stage of the summary:</a:t>
+            </a:r>
+          </a:p>
+          <a:p>
+            <a:r>
+              <a:t>Awareness (What): Environment provides the physical and behavioural conditions for work, including the values that must be demonstrable, the cultural norms that must be explicit, and the psychological safety that allows people to tell the truth early. Systems provide the operational infrastructure through which work flows, data moves, and coordination happens. Resources provide the human, financial, and operational capacity to deliver without degrading the people who carry the strategy. Governance provides the accountability and decision discipline that keeps execution visible, consequential, and actively managed.</a:t>
+            </a:r>
+          </a:p>
+          <a:p>
+            <a:r>
+              <a:t>When all four are aligned, execution becomes coordinated, predictable, and scalable. When any one is misaligned, friction appears, and the other three cannot fully compensate for it.</a:t>
+            </a:r>
+          </a:p>
+          <a:p>
+            <a:r>
+              <a:t>The Cultural Operating Code is a set of named, acronym-based norms, one per organisational value, that translate aspiration into observable, measurable, daily behaviour. Without the COC, values remain decoration. With it, they become the behavioural architecture of the organisation.</a:t>
+            </a:r>
+          </a:p>
+          <a:p/>
+          <a:p>
+            <a:r>
+              <a:t>Intelligence (Why): Left alone, each category of friction would accumulate silently until it compounds into a performance crisis. At the ignition point, execution depends neither on heroic individual effort nor on exceptional leadership attention. The Environment enables the work, physically and behaviourally. Systems streamline the flow of work, data, and decisions. Resources provide the capability and capacity to deliver over time, well beyond the first quarter. Governance maintains the rhythm of accountability, decision discipline, and ethical integrity that keeps the organisation advancing toward its strategic outcomes.</a:t>
+            </a:r>
+          </a:p>
+          <a:p/>
+          <a:p>
+            <a:r>
+              <a:t>Extrapolating (Where): Execution friction is not random. Each ESRG domain generates predictable friction patterns when it is misaligned with the strategic direction.</a:t>
+            </a:r>
+          </a:p>
+          <a:p>
+            <a:r>
+              <a:t>- Environment friction appears in the physical conditions that obstruct coordination and in the behavioural conditions (values misalignment, Cultural Operating Code failures, and psychological safety gaps) that suppress honest signals and erode the trust on which execution depends.</a:t>
+            </a:r>
+          </a:p>
+          <a:p>
+            <a:r>
+              <a:t>- Systems friction appears when workarounds normalise, data fragments across functions, and governance approvals sit outside workflows.</a:t>
+            </a:r>
+          </a:p>
+          <a:p>
+            <a:r>
+              <a:t>- Resources friction appears when capability gaps widen faster than development plans close them, when workloads become chronically unsustainable, and when financial investment defaults to historical patterns and lags current priorities.</a:t>
+            </a:r>
+          </a:p>
+          <a:p>
+            <a:r>
+              <a:t>- Governance friction appears when review forums produce reports and no decisions, when accountability standards are applied selectively, and when leaders are absent from the oversight processes they have commissioned.</a:t>
+            </a:r>
+          </a:p>
+          <a:p>
+            <a:r>
+              <a:t>Recognising these patterns early means understanding precisely where the operating system must evolve to carry the strategy at the pace and quality it demands.</a:t>
+            </a:r>
+          </a:p>
+          <a:p/>
+          <a:p>
+            <a:r>
+              <a:t>Integration (Collective): The Execution Muscle Scan is the collective discipline that closes this gap. It asks the leadership team to shift attention from outcomes to the conditions that produce them. The Enterprise ESRG Alignment Agenda is a collectively owned, priority-ordered view of where the organisation’s execution conditions must be strengthened before the next quarter begins.</a:t>
+            </a:r>
+          </a:p>
+          <a:p/>
+          <a:p>
+            <a:r>
+              <a:t>The Grounding Principle: Grounding is the condition that stabilises execution into consistent, lived organisational performance, ensuring that what is assigned is fully executed, what is executed is sustained, and what is sustained is reinforced through systems, culture, and accountability. ESRG Alignment is the operational expression of that principle.</a:t>
+            </a:r>
+          </a:p>
+          <a:p/>
+          <a:p>
+            <a:r>
               <a:t>Professional insights:</a:t>
             </a:r>
           </a:p>
@@ -2908,6 +3725,28 @@
             </a:r>
             <a:endParaRPr lang="en-US" dirty="0"/>
           </a:p>
+          <a:p/>
+          <a:p>
+            <a:r>
+              <a:t>Source detail (S2R® manuscript):</a:t>
+            </a:r>
+          </a:p>
+          <a:p/>
+          <a:p>
+            <a:r>
+              <a:t>Facilitator script (opening): Grounding asks a harder question. “Where are we going?” is the question Direction answers. “How are we moving?” is the question Influence answers. Grounding asks: “Is the organisation itself (the environment, the systems, the resources, the governance) built to sustain this performance over time?”</a:t>
+            </a:r>
+          </a:p>
+          <a:p>
+            <a:r>
+              <a:t>Most strategies that survive the first quarter fail by the third. They fail because the internal operating conditions of the organisation were never fully aligned to carry the weight of sustained execution, even where leaders still care and the objectives are right.</a:t>
+            </a:r>
+          </a:p>
+          <a:p>
+            <a:r>
+              <a:t>This unit addresses that directly. ESRG Alignment is the discipline of ensuring that the four domains that determine whether performance can be sustained (Environment, Systems, Resources, and Governance) are fully equipped to support consistent delivery on your strategic priorities.</a:t>
+            </a:r>
+          </a:p>
         </p:txBody>
       </p:sp>
       <p:sp>
@@ -3001,6 +3840,18 @@
 - ✎ Reflection — Most strategies that survive the first quarter fail by the third. What does that tell you about where execution actually breaks down in your organisation?</a:t>
             </a:r>
             <a:endParaRPr lang="en-US" dirty="0"/>
+          </a:p>
+          <a:p/>
+          <a:p>
+            <a:r>
+              <a:t>Source detail (S2R® manuscript):</a:t>
+            </a:r>
+          </a:p>
+          <a:p/>
+          <a:p>
+            <a:r>
+              <a:t>What alignment secures: ESRG Alignment ensures that the organisation is positioned to deliver consistently on its Key Results. Strategy alone does not sustain performance.</a:t>
+            </a:r>
           </a:p>
           <a:p/>
           <a:p>
@@ -3202,6 +4053,369 @@
           <a:p/>
           <a:p>
             <a:r>
+              <a:t>Source detail (S2R® manuscript):</a:t>
+            </a:r>
+          </a:p>
+          <a:p/>
+          <a:p>
+            <a:r>
+              <a:t>The domain cards above carry a selection of the alignment conditions. The full set for each domain follows, for the facilitator to draw on.</a:t>
+            </a:r>
+          </a:p>
+          <a:p/>
+          <a:p>
+            <a:r>
+              <a:t>E · ENVIRONMENT: the behavioural and physical conditions for work</a:t>
+            </a:r>
+          </a:p>
+          <a:p>
+            <a:r>
+              <a:t>Environment also determines whether the cultural conditions surrounding the work support or undermine strategic intent. Both dimensions must be aligned. A well-designed workspace in a psychologically unsafe culture will not sustain performance. A values-rich culture operating in dysfunctional infrastructure will not sustain execution. Environment is the intersection of both.</a:t>
+            </a:r>
+          </a:p>
+          <a:p/>
+          <a:p>
+            <a:r>
+              <a:t>Physical Dimension: the infrastructure, workspace design, and operational conditions that enable work to flow without unnecessary friction.</a:t>
+            </a:r>
+          </a:p>
+          <a:p>
+            <a:r>
+              <a:t>1. Infrastructure: the foundational physical conditions that determine whether work can be conducted reliably and without avoidable disruption.</a:t>
+            </a:r>
+          </a:p>
+          <a:p>
+            <a:r>
+              <a:t>- Reliable connectivity, equipment, and working spaces must exist as a baseline that no team has to earn as a privilege.</a:t>
+            </a:r>
+          </a:p>
+          <a:p>
+            <a:r>
+              <a:t>- Facilities maintenance must be responsive so teams do not build structural workarounds that become permanent inefficiencies.</a:t>
+            </a:r>
+          </a:p>
+          <a:p>
+            <a:r>
+              <a:t>- Critical systems, tools, and physical assets must be maintained to the standard the strategy demands, even where the budget defaults to a lower one.</a:t>
+            </a:r>
+          </a:p>
+          <a:p>
+            <a:r>
+              <a:t>- Business continuity provisions must ensure that infrastructure failure does not halt execution.</a:t>
+            </a:r>
+          </a:p>
+          <a:p>
+            <a:r>
+              <a:t>2. Workspace Design: the intentional configuration of physical space to reduce friction, enable collaboration, and reflect strategic priorities.</a:t>
+            </a:r>
+          </a:p>
+          <a:p>
+            <a:r>
+              <a:t>- Team seating and physical layout must reduce unnecessary delays between dependent roles: proximity is a performance variable.</a:t>
+            </a:r>
+          </a:p>
+          <a:p>
+            <a:r>
+              <a:t>- Collaboration zones must enable rapid problem-solving without disrupting others.</a:t>
+            </a:r>
+          </a:p>
+          <a:p>
+            <a:r>
+              <a:t>- Quiet zones must protect the deep focus work that drives quality output.</a:t>
+            </a:r>
+          </a:p>
+          <a:p>
+            <a:r>
+              <a:t>- Visual boards and workspace signals must reflect current strategic priorities, with legacy messaging from a previous planning cycle taken down.</a:t>
+            </a:r>
+          </a:p>
+          <a:p>
+            <a:r>
+              <a:t>- Service-facing areas must reflect the organisation’s service promise: the physical environment communicates brand and culture to customers before any person does.</a:t>
+            </a:r>
+          </a:p>
+          <a:p>
+            <a:r>
+              <a:t>3. Operational Conditions: the accessibility and inclusion standards that determine whether all people can participate fully in execution.</a:t>
+            </a:r>
+          </a:p>
+          <a:p>
+            <a:r>
+              <a:t>- Staff must be able to access decision-makers and critical support teams quickly when issues arise: organisational accessibility is an execution variable.</a:t>
+            </a:r>
+          </a:p>
+          <a:p>
+            <a:r>
+              <a:t>- Remote and hybrid staff must participate equally in meetings and decisions.</a:t>
+            </a:r>
+          </a:p>
+          <a:p>
+            <a:r>
+              <a:t>- Workspaces must support people with mobility, sensory, or health needs without requiring them to advocate for basic functionality.</a:t>
+            </a:r>
+          </a:p>
+          <a:p>
+            <a:r>
+              <a:t>- Ergonomic workstations and recovery spaces must exist to manage sustained performance pressure.</a:t>
+            </a:r>
+          </a:p>
+          <a:p/>
+          <a:p>
+            <a:r>
+              <a:t>Behavioural Dimension: the values, cultural norms, and psychological conditions that determine how people engage with each other, with leadership, and with the demands of the strategy.</a:t>
+            </a:r>
+          </a:p>
+          <a:p>
+            <a:r>
+              <a:t>1. Values: Values are the non-negotiable principles that define how the organisation conducts itself in pursuit of its strategic goals. They are the behavioural standard against which every leader and every team member is held accountable. For values to function as a genuine performance driver, three conditions must be met.</a:t>
+            </a:r>
+          </a:p>
+          <a:p>
+            <a:r>
+              <a:t>- Values must be demonstrable. Each organisational value must be translated into observable, specific behaviours that can be seen, recognised, and evaluated. Abstract values (integrity, excellence, respect) mean nothing until the organisation defines precisely what they look like in practice. What does integrity look like in a performance review conversation? What does excellence look like in how a team handles a missed deadline? The behavioural translation of values is the work most organisations skip, and the absence of that translation is why values fail to shape culture.</a:t>
+            </a:r>
+          </a:p>
+          <a:p>
+            <a:r>
+              <a:t>- Values must be incorporated into performance measurement. Values cannot be enforced through aspiration alone. They must be embedded in the performance management system as a formal evaluation dimension. This is achieved through 360-degree feedback: a structured process in which each leader and team member is assessed on what they delivered and on how they delivered it, evaluated by those above, alongside, and below them in the organisation.</a:t>
+            </a:r>
+          </a:p>
+          <a:p>
+            <a:r>
+              <a:t>360 feedback on values serves three functions: it makes values-alignment visible and measurable where it was subjective and invisible; it removes the protection that high performers often enjoy when their results excuse their behaviour (sustained performance requires both); it signals to the entire organisation that how work is done is as strategically important as what is achieved.</a:t>
+            </a:r>
+          </a:p>
+          <a:p>
+            <a:r>
+              <a:t>- Values must be enforced through consequences. Recognition must reward values-aligned behaviour as well as results. Non-compliance with values, particularly by leaders, must carry consequences that are applied consistently regardless of seniority. Selective enforcement of values destroys cultural credibility faster than any single failure of conduct.</a:t>
+            </a:r>
+          </a:p>
+          <a:p>
+            <a:r>
+              <a:t>2. Cultural Norms: Cultural norms are the lived translation of values into the organisation’s daily way of working. Values define the what: the principles the organisation stands for. Cultural norms define the how: the consistent patterns of behaviour, interaction, and decision-making that make those values real and recognisable in practice. The discipline of norm-setting is the bridge between values on paper and values in practice.</a:t>
+            </a:r>
+          </a:p>
+          <a:p>
+            <a:r>
+              <a:t>Cultural Operating Code (the Values-to-Norms Translation Principle): For each organisational value, leadership must define the specific norm that operationalises it: the observable, repeatable behaviour that becomes the organisational way of life. A useful discipline for making this translation explicit and memorable is to express each norm as a named acronym or principle that the organisation can own, use, and reinforce consistently.</a:t>
+            </a:r>
+          </a:p>
+          <a:p>
+            <a:r>
+              <a:t>Example: if one of the organisation’s values is Accountability, the cultural norm might be expressed as OAR: Own it. Act on it. Report it. Every commitment is owned by a named person, acted on within an agreed timeframe, and reported on honestly regardless of outcome. This single norm, derived directly from the value of Accountability, tells every person in the organisation exactly what Accountability looks like in daily practice. It is teachable, measurable, and replicable across functions and geographies.</a:t>
+            </a:r>
+          </a:p>
+          <a:p>
+            <a:r>
+              <a:t>The same translation applies to every value the organisation holds. The result is a Cultural Operating Code: a set of named norms that define the organisation’s way of life and give leadership a shared language for reinforcing, recognising, and correcting behaviour.</a:t>
+            </a:r>
+          </a:p>
+          <a:p>
+            <a:r>
+              <a:t>Cultural norms must be:</a:t>
+            </a:r>
+          </a:p>
+          <a:p>
+            <a:r>
+              <a:t>- Explicit: named, defined, and communicated, with nothing left to assumption or absorbed through osmosis.</a:t>
+            </a:r>
+          </a:p>
+          <a:p>
+            <a:r>
+              <a:t>- Modelled: demonstrated consistently by leadership before being expected of teams.</a:t>
+            </a:r>
+          </a:p>
+          <a:p>
+            <a:r>
+              <a:t>- Reinforced: recognised when present, corrected when absent, embedded in onboarding so new staff inherit the culture deliberately.</a:t>
+            </a:r>
+          </a:p>
+          <a:p>
+            <a:r>
+              <a:t>- Reviewed: assessed periodically to ensure they remain aligned to the current strategic direction, because norms that served a previous era can become obstacles in the next.</a:t>
+            </a:r>
+          </a:p>
+          <a:p>
+            <a:r>
+              <a:t>3. Psychological Conditions: the safety and trust conditions that determine whether people will engage fully, speak honestly, and perform sustainably under the demands of the strategy.</a:t>
+            </a:r>
+          </a:p>
+          <a:p>
+            <a:r>
+              <a:t>- Psychological safety must exist so people surface problems early and stop managing impressions: a culture of silence is a governance failure before it is a cultural one.</a:t>
+            </a:r>
+          </a:p>
+          <a:p>
+            <a:r>
+              <a:t>- The environment must protect people from aggression, hostility, or disrespect from colleagues, customers, or leadership: safety is a performance condition as well as an ethical one.</a:t>
+            </a:r>
+          </a:p>
+          <a:p>
+            <a:r>
+              <a:t>- Teams must be able to signal unsustainable pressure early: the ability to speak up before performance degrades is a strategic asset.</a:t>
+            </a:r>
+          </a:p>
+          <a:p>
+            <a:r>
+              <a:t>- Onboarding and integration practices must transmit the behavioural dimension of environment to new staff deliberately.</a:t>
+            </a:r>
+          </a:p>
+          <a:p/>
+          <a:p>
+            <a:r>
+              <a:t>S · SYSTEMS: the operational infrastructure of execution (all nine alignment conditions)</a:t>
+            </a:r>
+          </a:p>
+          <a:p>
+            <a:r>
+              <a:t>Process Clarity: core processes must be documented, current, and easy to find; handoffs between teams must be mapped and visible; roles within workflows must be clearly defined and owned.</a:t>
+            </a:r>
+          </a:p>
+          <a:p>
+            <a:r>
+              <a:t>Data Integrity: a trusted single source of truth must exist for key operational data; definitions, fields, and status labels must mean the same thing across teams; reporting must reflect operational reality, free of curated narratives.</a:t>
+            </a:r>
+          </a:p>
+          <a:p>
+            <a:r>
+              <a:t>Workflow Visibility: teams must be able to see where work sits in the end-to-end process; dashboards must update fast enough to support real-time decision-making; bottlenecks must be visible before they compound.</a:t>
+            </a:r>
+          </a:p>
+          <a:p>
+            <a:r>
+              <a:t>Automation and Efficiency: routine tasks should be automated so skilled staff focus on judgement work; alerts and escalation triggers should be embedded in systems so that they do not depend on individual memory.</a:t>
+            </a:r>
+          </a:p>
+          <a:p>
+            <a:r>
+              <a:t>System Integration: systems must communicate with each other to eliminate duplicate work and data inconsistency; integration between central systems and local workarounds (spreadsheets, informal trackers) must be controlled and rationalised.</a:t>
+            </a:r>
+          </a:p>
+          <a:p>
+            <a:r>
+              <a:t>Reliability and Continuity: critical systems must maintain reliable uptime; business continuity and backup procedures must be tested, with nothing left to assumption.</a:t>
+            </a:r>
+          </a:p>
+          <a:p>
+            <a:r>
+              <a:t>Governance Integration: approvals and sign-offs must be simple, time-bound, and traceable within the system; compliance checks must exist within the workflow, with no separate, after-the-fact layer.</a:t>
+            </a:r>
+          </a:p>
+          <a:p>
+            <a:r>
+              <a:t>Knowledge Accessibility: staff must know where to find operational guidance when needed; document versions must be controlled so teams do not act on outdated instructions.</a:t>
+            </a:r>
+          </a:p>
+          <a:p>
+            <a:r>
+              <a:t>Continuous Improvement: recurring process failures must be captured and fed back into system design; system updates must be communicated with sufficient lead time for teams to adapt.</a:t>
+            </a:r>
+          </a:p>
+          <a:p/>
+          <a:p>
+            <a:r>
+              <a:t>R · RESOURCES: the capability capacity of the organisation (all eight alignment conditions)</a:t>
+            </a:r>
+          </a:p>
+          <a:p>
+            <a:r>
+              <a:t>Workforce Capacity: staffing levels must support both normal and peak demand without chronic overload; workload distribution must remain realistic, because burnout is a strategic risk as well as a wellbeing concern.</a:t>
+            </a:r>
+          </a:p>
+          <a:p>
+            <a:r>
+              <a:t>Capability Alignment: skills within teams must match current work requirements; talent planning must anticipate future capability needs before gaps become execution constraints.</a:t>
+            </a:r>
+          </a:p>
+          <a:p>
+            <a:r>
+              <a:t>Tools and Operational Support: teams must have functioning tools, equipment, and software that match the demands of the work; specialist expertise must be accessible when required, internally or through reliable external partners.</a:t>
+            </a:r>
+          </a:p>
+          <a:p>
+            <a:r>
+              <a:t>Training and Development: training must accompany changes to processes, systems, or strategic direction; coaching and mentoring must support capability growth as well as performance management.</a:t>
+            </a:r>
+          </a:p>
+          <a:p>
+            <a:r>
+              <a:t>Operational Resilience: backup coverage must exist for critical roles; knowledge transfer must occur before key staff rotate or exit.</a:t>
+            </a:r>
+          </a:p>
+          <a:p>
+            <a:r>
+              <a:t>Financial Support: budget must be available for critical strategic initiatives; funding requests for operational fixes must move quickly.</a:t>
+            </a:r>
+          </a:p>
+          <a:p>
+            <a:r>
+              <a:t>Capacity Planning: resource allocation must reflect strategic priority work, whatever the historical entitlement or internal political weight; regulatory and administrative workload must be included in capacity planning, because it crowds out execution capacity if invisible.</a:t>
+            </a:r>
+          </a:p>
+          <a:p>
+            <a:r>
+              <a:t>Employee Sustainability: psychological safety and support must exist in high-pressure roles; teams must be able to signal unsustainable workloads early; administrative support must exist so specialists are freed from low-value task management.</a:t>
+            </a:r>
+          </a:p>
+          <a:p/>
+          <a:p>
+            <a:r>
+              <a:t>G · GOVERNANCE: the accountability and decision discipline system (all ten alignment conditions)</a:t>
+            </a:r>
+          </a:p>
+          <a:p>
+            <a:r>
+              <a:t>Clear Accountability: each area of strategic work must have a clearly assigned owner; delegation must match responsibility with commensurate authority.</a:t>
+            </a:r>
+          </a:p>
+          <a:p>
+            <a:r>
+              <a:t>Decision Authority: decision rights must be clearly defined, communicated, and understood at every level; approval chains must remain short enough to support the pace the strategy demands.</a:t>
+            </a:r>
+          </a:p>
+          <a:p>
+            <a:r>
+              <a:t>Escalation Discipline: escalation rules must be clear and consistently followed, so that escalation does not have to be navigated through relationships; governance forums must include people who have the authority to remove blockages, alongside the people who can report on them.</a:t>
+            </a:r>
+          </a:p>
+          <a:p>
+            <a:r>
+              <a:t>Execution Oversight: regular review forums must exist to make decisions and drive accountability, going beyond the collection of status updates; risk discussions must be held together with performance discussions, as a standard discipline.</a:t>
+            </a:r>
+          </a:p>
+          <a:p>
+            <a:r>
+              <a:t>Transparency: decision rationale must be documented and communicated so the organisation understands the logic as well as the outcome; reporting requirements must remain clear, stable, and proportionate, because reporting overload is itself a governance failure.</a:t>
+            </a:r>
+          </a:p>
+          <a:p>
+            <a:r>
+              <a:t>Ethical Integrity: leaders must model the ethical behaviour and fairness they expect of others; conflicts of interest must be declared, managed, and removed from decision pathways; the governance system must apply consequences consistently, because selective enforcement destroys credibility faster than any single failure.</a:t>
+            </a:r>
+          </a:p>
+          <a:p>
+            <a:r>
+              <a:t>Accountability Enforcement: consequences for non-performance or non-compliance must be applied consistently regardless of seniority; recognition systems must reinforce the behaviours the organisation values as well as the results it celebrates.</a:t>
+            </a:r>
+          </a:p>
+          <a:p>
+            <a:r>
+              <a:t>Policy Clarity: governance documents must be accessible and written in language the organisation can act on; regulatory requirements must be properly understood by everyone responsible for compliance, beyond the specialists.</a:t>
+            </a:r>
+          </a:p>
+          <a:p>
+            <a:r>
+              <a:t>Leadership Visibility: leadership presence must reinforce governance processes through active, visible engagement that is not delegated to governance teams; leaders who are absent from execution oversight signal that governance is optional.</a:t>
+            </a:r>
+          </a:p>
+          <a:p>
+            <a:r>
+              <a:t>Governance Adaptability: governance structures must evolve as operating conditions, strategy, and organisational scale change; governance that was fit for a previous strategic era must be actively updated before inertia preserves it.</a:t>
+            </a:r>
+          </a:p>
+          <a:p/>
+          <a:p>
+            <a:r>
               <a:t>Professional insights:</a:t>
             </a:r>
           </a:p>
@@ -3324,6 +4538,18 @@
           <a:p/>
           <a:p>
             <a:r>
+              <a:t>Source detail (S2R® manuscript):</a:t>
+            </a:r>
+          </a:p>
+          <a:p/>
+          <a:p>
+            <a:r>
+              <a:t>What synchronisation produces: When aligned together, the four domains create the operational stability required for sustained strategy execution.</a:t>
+            </a:r>
+          </a:p>
+          <a:p/>
+          <a:p>
+            <a:r>
               <a:t>Professional insights:</a:t>
             </a:r>
           </a:p>
@@ -3436,6 +4662,18 @@
             </a:r>
             <a:endParaRPr lang="en-US" dirty="0"/>
           </a:p>
+          <a:p/>
+          <a:p>
+            <a:r>
+              <a:t>Source detail (S2R® manuscript):</a:t>
+            </a:r>
+          </a:p>
+          <a:p/>
+          <a:p>
+            <a:r>
+              <a:t>Section opening: The ESRG framework explains how the enterprise system reinforces the work being done. Each domain contributes a specific enabling condition that allows execution to continue steadily over time. When these four conditions operate together, the organisation develops the capacity to sustain execution momentum beyond the initial launch phase, and beyond the attention span of any single leadership cycle.</a:t>
+            </a:r>
+          </a:p>
         </p:txBody>
       </p:sp>
       <p:sp>
@@ -3548,6 +4786,112 @@
 - ✎ Reflection — Which enabling condition is weakest in your organisation right now — and what is the execution cost?</a:t>
             </a:r>
             <a:endParaRPr lang="en-US" dirty="0"/>
+          </a:p>
+          <a:p/>
+          <a:p>
+            <a:r>
+              <a:t>Source detail (S2R® manuscript):</a:t>
+            </a:r>
+          </a:p>
+          <a:p/>
+          <a:p>
+            <a:r>
+              <a:t>E · Enable the Work, further detail: The environment must make it easy for people to collaborate, focus, and perform, in both the physical and behavioural conditions of work. Execution improves dramatically when the conditions of work remove unnecessary barriers. Environment operates across two dimensions that must both be active for the enabling effect to be real.</a:t>
+            </a:r>
+          </a:p>
+          <a:p>
+            <a:r>
+              <a:t>Physical dimension: Teams must be able to reach one another quickly, share information easily, and coordinate decisions without delay. Workspace design must allow people to move naturally between focused work and collaborative problem-solving. Hybrid and distributed teams must be able to participate equally in conversations and decisions so coordination remains seamless regardless of location. When these conditions are absent, teams spend their energy navigating obstacles, and the work stops advancing.</a:t>
+            </a:r>
+          </a:p>
+          <a:p>
+            <a:r>
+              <a:t>Behavioural dimension: It enables the quality and sustainability of execution. This is where values, cultural norms, and psychological conditions determine whether people engage fully, speak honestly, and perform to the standard the strategy demands.</a:t>
+            </a:r>
+          </a:p>
+          <a:p>
+            <a:r>
+              <a:t>Values that are merely stated do not enable performance. With demonstrable, measured, and enforced values, the standard of conduct is as visible and as consequential as the standard of results. When values are embedded in 360-degree feedback, where every leader is assessed on what they delivered and on how they delivered it, the organisation sends an unambiguous signal: character and conduct are performance variables.</a:t>
+            </a:r>
+          </a:p>
+          <a:p>
+            <a:r>
+              <a:t>Cultural norms translate that signal into the daily way of working. Each value is expressed as a named, actionable norm that the organisation can own, teach, and reinforce. The norm defines the behaviour. The behaviour shapes the culture. The culture enables execution to be sustained beyond any individual’s presence or attention.</a:t>
+            </a:r>
+          </a:p>
+          <a:p>
+            <a:r>
+              <a:t>Psychological safety extends to challenging decisions constructively and signalling unsustainable pressure without fear of consequence. The real-time intelligence this produces is what allows leaders to intervene before friction compounds into failure.</a:t>
+            </a:r>
+          </a:p>
+          <a:p>
+            <a:r>
+              <a:t>When both dimensions of environment are aligned, teams spend their energy advancing the work. Issues surface earlier. Conversations become more constructive. Performance becomes a shared standard.</a:t>
+            </a:r>
+          </a:p>
+          <a:p/>
+          <a:p>
+            <a:r>
+              <a:t>S · Streamline the Flow, further detail: Systems must allow work, data, and decisions to move smoothly across the organisation. Systems provide the pathways through which information, tasks, and decisions move.</a:t>
+            </a:r>
+          </a:p>
+          <a:p>
+            <a:r>
+              <a:t>Streamlined systems eliminate unnecessary manual work. Integrated platforms allow data to move without repeated entry, while dashboards and workflow tools provide visibility into progress across the organisation.</a:t>
+            </a:r>
+          </a:p>
+          <a:p>
+            <a:r>
+              <a:t>When systems are streamlined, coordination improves naturally. Teams spend less time reconstructing information or clarifying processes and more time acting on insights that move the organisation toward its Key Results.</a:t>
+            </a:r>
+          </a:p>
+          <a:p/>
+          <a:p>
+            <a:r>
+              <a:t>R · Resource the Strategy, further detail: Capabilities, capacity, and tools must match the ambition of the Key Results. Strategic ambition creates demand on the organisation’s resources. When resources are aligned with strategic priorities, teams can deliver outcomes with confidence.</a:t>
+            </a:r>
+          </a:p>
+          <a:p>
+            <a:r>
+              <a:t>Staffing levels must reflect operational demand, whatever the historical headcount or political negotiation. Specialist expertise must be available when required. Funding pathways must be responsive enough to support the pace of execution the strategy demands.</a:t>
+            </a:r>
+          </a:p>
+          <a:p>
+            <a:r>
+              <a:t>Employee sustainability is the recognition that people are not an infinite resource. Burnout is a strategic risk. Resourcing the people who carry the strategy means giving them the capacity, the tools, the development, and the psychological support to perform well beyond the first quarter.</a:t>
+            </a:r>
+          </a:p>
+          <a:p>
+            <a:r>
+              <a:t>Without adequate resources, execution momentum slows as teams attempt to compensate for gaps through personal effort. That compensation is not sustainable. By resourcing the strategy appropriately, leaders ensure that the organisation’s ambitions remain achievable within the realities of its operational capacity.</a:t>
+            </a:r>
+          </a:p>
+          <a:p/>
+          <a:p>
+            <a:r>
+              <a:t>G · Govern the Rhythm, further detail: Clear decision rights and accountability structures sustain execution discipline. Governance provides the structure that maintains the rhythm. It clarifies who owns each outcome, who has the authority to decide, and how issues are escalated when obstacles arise.</a:t>
+            </a:r>
+          </a:p>
+          <a:p>
+            <a:r>
+              <a:t>Escalation pathways ensure that challenges are addressed at the right level with the right authority. Performance reviews reinforce accountability for results, and risk discussions sit alongside them as a standard discipline, well before any crisis.</a:t>
+            </a:r>
+          </a:p>
+          <a:p>
+            <a:r>
+              <a:t>Consistent enforcement is what makes governance real.</a:t>
+            </a:r>
+          </a:p>
+          <a:p>
+            <a:r>
+              <a:t>This discipline creates continuity in execution. Teams understand how progress will be assessed, where decisions will occur, and what will happen when commitments are not met. That clarity removes hesitation and maintains the cadence of execution that keeps work advancing toward the Key Results.</a:t>
+            </a:r>
+          </a:p>
+          <a:p/>
+          <a:p>
+            <a:r>
+              <a:t>The ignition point: Progress continues steadily, predictably, and sustainably toward the strategic outcomes the leadership team has defined.</a:t>
+            </a:r>
           </a:p>
           <a:p/>
           <a:p>

--- a/Unit decks/Unit 10 - ESRG Alignment.pptx
+++ b/Unit decks/Unit 10 - ESRG Alignment.pptx
@@ -3716,7 +3716,7 @@
 Introducing the four domains that determine whether performance can be sustained — and the conditions required for each to support consistent strategic delivery.
 Section learning outcomes:
 1. Recognise the environment, systems, resources and governance conditions that sustain performance.
-2. Explain how shared behavioural norms shape the operating environment.
+2. Assess how shared behavioural norms shape the operating environment.
 FACILITATOR GUIDANCE — Awareness
 Open with the hard question: “Is the organisation itself built to sustain this performance over time?” That framing immediately distinguishes Grounding from the previous pillars and establishes why this unit matters even when strategy is clear and leadership is committed.
 The ESRG domain cards are the core of this section. Work through each card in turn. The E card is the richest — take extra time on the Behavioural Dimension, particularly the Cultural Operating Code. This concept connects directly to the Application exercise so it must land here first.
@@ -4652,7 +4652,7 @@
 Why ESRG Alignment Drives Sustained Execution
 Understanding how each ESRG domain removes a specific category of friction — and seeing the discipline in action through two worked examples: the Cultural Operating Code and the ESRG Execution Scanner.
 Section learning outcomes:
-1. Explain how each organisational domain removes a specific source of friction from execution.
+1. Determine the source of friction each organisational domain removes from execution.
 2. Assess where operating conditions support or constrain strategic priorities.
 FACILITATOR GUIDANCE — Intelligence
 This section has two worked examples — use them both as live teaching moments. Walk through the COC example to demonstrate what the translation discipline produces before participants attempt it in Application. Walk through the Scanner example to show what collective intelligence looks like before they use the tool.
@@ -14396,7 +14396,7 @@
                 <a:ea typeface="Calibri" pitchFamily="34" charset="-122"/>
                 <a:cs typeface="Calibri" pitchFamily="34" charset="-120"/>
               </a:rPr>
-              <a:t>Explain how shared behavioural norms shape the operating environment.</a:t>
+              <a:t>Assess how shared behavioural norms shape the operating environment.</a:t>
             </a:r>
             <a:endParaRPr lang="en-US" sz="2400" dirty="0"/>
           </a:p>
@@ -15794,7 +15794,7 @@
                 <a:ea typeface="Calibri" pitchFamily="34" charset="-122"/>
                 <a:cs typeface="Calibri" pitchFamily="34" charset="-120"/>
               </a:rPr>
-              <a:t>Explain how each organisational domain removes a specific source of friction from execution.</a:t>
+              <a:t>Determine the source of friction each organisational domain removes from execution.</a:t>
             </a:r>
             <a:endParaRPr lang="en-US" sz="2400" dirty="0"/>
           </a:p>

--- a/Unit decks/Unit 10 - ESRG Alignment.pptx
+++ b/Unit decks/Unit 10 - ESRG Alignment.pptx
@@ -6412,6 +6412,12 @@
             </a:r>
             <a:r>
               <a:t> "Let us take the four parts in order."</a:t>
+            </a:r>
+          </a:p>
+          <a:p>
+            <a:r>
+              <a:rPr b="1"/>
+              <a:t>Close the group work with Our Position. Say: "When your record is complete, write as a group a short summary statement of your team's position from this unit, in the unit's own terms. Every member agrees it with the rest of the record. It closes this unit's section of your Capstone S2R Blueprint and guides the assessors through your work."</a:t>
             </a:r>
           </a:p>
         </p:txBody>
